--- a/figures_recharge/fig5.pptx
+++ b/figures_recharge/fig5.pptx
@@ -6,6 +6,7 @@
   </p:sldMasterIdLst>
   <p:sldIdLst>
     <p:sldId id="256" r:id="rId2"/>
+    <p:sldId id="257" r:id="rId3"/>
   </p:sldIdLst>
   <p:sldSz cx="12192000" cy="6858000"/>
   <p:notesSz cx="6858000" cy="9144000"/>
@@ -104,6 +105,11 @@
       </a:defRPr>
     </a:lvl9pPr>
   </p:defaultTextStyle>
+  <p:extLst>
+    <p:ext uri="{EFAFB233-063F-42B5-8137-9DF3F51BA10A}">
+      <p15:sldGuideLst xmlns:p15="http://schemas.microsoft.com/office/powerpoint/2012/main"/>
+    </p:ext>
+  </p:extLst>
 </p:presentation>
 </file>
 
@@ -256,7 +262,7 @@
           <a:p>
             <a:fld id="{2A899939-7CA9-4030-9537-3682CC1D5228}" type="datetimeFigureOut">
               <a:rPr lang="en-GB" smtClean="0"/>
-              <a:t>07/04/2026</a:t>
+              <a:t>20/07/2026</a:t>
             </a:fld>
             <a:endParaRPr lang="en-GB"/>
           </a:p>
@@ -456,7 +462,7 @@
           <a:p>
             <a:fld id="{2A899939-7CA9-4030-9537-3682CC1D5228}" type="datetimeFigureOut">
               <a:rPr lang="en-GB" smtClean="0"/>
-              <a:t>07/04/2026</a:t>
+              <a:t>20/07/2026</a:t>
             </a:fld>
             <a:endParaRPr lang="en-GB"/>
           </a:p>
@@ -666,7 +672,7 @@
           <a:p>
             <a:fld id="{2A899939-7CA9-4030-9537-3682CC1D5228}" type="datetimeFigureOut">
               <a:rPr lang="en-GB" smtClean="0"/>
-              <a:t>07/04/2026</a:t>
+              <a:t>20/07/2026</a:t>
             </a:fld>
             <a:endParaRPr lang="en-GB"/>
           </a:p>
@@ -866,7 +872,7 @@
           <a:p>
             <a:fld id="{2A899939-7CA9-4030-9537-3682CC1D5228}" type="datetimeFigureOut">
               <a:rPr lang="en-GB" smtClean="0"/>
-              <a:t>07/04/2026</a:t>
+              <a:t>20/07/2026</a:t>
             </a:fld>
             <a:endParaRPr lang="en-GB"/>
           </a:p>
@@ -1142,7 +1148,7 @@
           <a:p>
             <a:fld id="{2A899939-7CA9-4030-9537-3682CC1D5228}" type="datetimeFigureOut">
               <a:rPr lang="en-GB" smtClean="0"/>
-              <a:t>07/04/2026</a:t>
+              <a:t>20/07/2026</a:t>
             </a:fld>
             <a:endParaRPr lang="en-GB"/>
           </a:p>
@@ -1410,7 +1416,7 @@
           <a:p>
             <a:fld id="{2A899939-7CA9-4030-9537-3682CC1D5228}" type="datetimeFigureOut">
               <a:rPr lang="en-GB" smtClean="0"/>
-              <a:t>07/04/2026</a:t>
+              <a:t>20/07/2026</a:t>
             </a:fld>
             <a:endParaRPr lang="en-GB"/>
           </a:p>
@@ -1825,7 +1831,7 @@
           <a:p>
             <a:fld id="{2A899939-7CA9-4030-9537-3682CC1D5228}" type="datetimeFigureOut">
               <a:rPr lang="en-GB" smtClean="0"/>
-              <a:t>07/04/2026</a:t>
+              <a:t>20/07/2026</a:t>
             </a:fld>
             <a:endParaRPr lang="en-GB"/>
           </a:p>
@@ -1967,7 +1973,7 @@
           <a:p>
             <a:fld id="{2A899939-7CA9-4030-9537-3682CC1D5228}" type="datetimeFigureOut">
               <a:rPr lang="en-GB" smtClean="0"/>
-              <a:t>07/04/2026</a:t>
+              <a:t>20/07/2026</a:t>
             </a:fld>
             <a:endParaRPr lang="en-GB"/>
           </a:p>
@@ -2080,7 +2086,7 @@
           <a:p>
             <a:fld id="{2A899939-7CA9-4030-9537-3682CC1D5228}" type="datetimeFigureOut">
               <a:rPr lang="en-GB" smtClean="0"/>
-              <a:t>07/04/2026</a:t>
+              <a:t>20/07/2026</a:t>
             </a:fld>
             <a:endParaRPr lang="en-GB"/>
           </a:p>
@@ -2393,7 +2399,7 @@
           <a:p>
             <a:fld id="{2A899939-7CA9-4030-9537-3682CC1D5228}" type="datetimeFigureOut">
               <a:rPr lang="en-GB" smtClean="0"/>
-              <a:t>07/04/2026</a:t>
+              <a:t>20/07/2026</a:t>
             </a:fld>
             <a:endParaRPr lang="en-GB"/>
           </a:p>
@@ -2682,7 +2688,7 @@
           <a:p>
             <a:fld id="{2A899939-7CA9-4030-9537-3682CC1D5228}" type="datetimeFigureOut">
               <a:rPr lang="en-GB" smtClean="0"/>
-              <a:t>07/04/2026</a:t>
+              <a:t>20/07/2026</a:t>
             </a:fld>
             <a:endParaRPr lang="en-GB"/>
           </a:p>
@@ -2925,7 +2931,7 @@
           <a:p>
             <a:fld id="{2A899939-7CA9-4030-9537-3682CC1D5228}" type="datetimeFigureOut">
               <a:rPr lang="en-GB" smtClean="0"/>
-              <a:t>07/04/2026</a:t>
+              <a:t>20/07/2026</a:t>
             </a:fld>
             <a:endParaRPr lang="en-GB"/>
           </a:p>
@@ -3505,6 +3511,198 @@
 </p:sld>
 </file>
 
+<file path=ppt/slides/slide2.xml><?xml version="1.0" encoding="utf-8"?>
+<p:sld xmlns:a="http://schemas.openxmlformats.org/drawingml/2006/main" xmlns:r="http://schemas.openxmlformats.org/officeDocument/2006/relationships" xmlns:p="http://schemas.openxmlformats.org/presentationml/2006/main">
+  <p:cSld>
+    <p:spTree>
+      <p:nvGrpSpPr>
+        <p:cNvPr id="1" name="">
+          <a:extLst>
+            <a:ext uri="{FF2B5EF4-FFF2-40B4-BE49-F238E27FC236}">
+              <a16:creationId xmlns:a16="http://schemas.microsoft.com/office/drawing/2014/main" id="{C45314FE-9D91-BA2E-E03A-61A83F153EE4}"/>
+            </a:ext>
+          </a:extLst>
+        </p:cNvPr>
+        <p:cNvGrpSpPr/>
+        <p:nvPr/>
+      </p:nvGrpSpPr>
+      <p:grpSpPr>
+        <a:xfrm>
+          <a:off x="0" y="0"/>
+          <a:ext cx="0" cy="0"/>
+          <a:chOff x="0" y="0"/>
+          <a:chExt cx="0" cy="0"/>
+        </a:xfrm>
+      </p:grpSpPr>
+      <p:pic>
+        <p:nvPicPr>
+          <p:cNvPr id="5" name="Picture 4">
+            <a:extLst>
+              <a:ext uri="{FF2B5EF4-FFF2-40B4-BE49-F238E27FC236}">
+                <a16:creationId xmlns:a16="http://schemas.microsoft.com/office/drawing/2014/main" id="{7B052B6E-0390-18D5-B118-D40528B5EF7E}"/>
+              </a:ext>
+            </a:extLst>
+          </p:cNvPr>
+          <p:cNvPicPr>
+            <a:picLocks noChangeAspect="1"/>
+          </p:cNvPicPr>
+          <p:nvPr/>
+        </p:nvPicPr>
+        <p:blipFill>
+          <a:blip r:embed="rId2"/>
+          <a:stretch>
+            <a:fillRect/>
+          </a:stretch>
+        </p:blipFill>
+        <p:spPr>
+          <a:xfrm>
+            <a:off x="1821499" y="283236"/>
+            <a:ext cx="9418338" cy="2296297"/>
+          </a:xfrm>
+          <a:prstGeom prst="rect">
+            <a:avLst/>
+          </a:prstGeom>
+        </p:spPr>
+      </p:pic>
+      <p:sp>
+        <p:nvSpPr>
+          <p:cNvPr id="8" name="TextBox 7">
+            <a:extLst>
+              <a:ext uri="{FF2B5EF4-FFF2-40B4-BE49-F238E27FC236}">
+                <a16:creationId xmlns:a16="http://schemas.microsoft.com/office/drawing/2014/main" id="{9A8298DF-3C9B-F947-7FBE-C2987EF3DBE9}"/>
+              </a:ext>
+            </a:extLst>
+          </p:cNvPr>
+          <p:cNvSpPr txBox="1"/>
+          <p:nvPr/>
+        </p:nvSpPr>
+        <p:spPr>
+          <a:xfrm>
+            <a:off x="6456693" y="2676305"/>
+            <a:ext cx="554477" cy="369332"/>
+          </a:xfrm>
+          <a:prstGeom prst="rect">
+            <a:avLst/>
+          </a:prstGeom>
+          <a:noFill/>
+        </p:spPr>
+        <p:txBody>
+          <a:bodyPr wrap="square" rtlCol="0">
+            <a:spAutoFit/>
+          </a:bodyPr>
+          <a:lstStyle>
+            <a:defPPr>
+              <a:defRPr lang="en-BE"/>
+            </a:defPPr>
+            <a:lvl1pPr>
+              <a:defRPr>
+                <a:solidFill>
+                  <a:srgbClr val="0070C0"/>
+                </a:solidFill>
+              </a:defRPr>
+            </a:lvl1pPr>
+          </a:lstStyle>
+          <a:p>
+            <a:r>
+              <a:rPr lang="en-GB" dirty="0">
+                <a:latin typeface="Segoe UI" panose="020B0502040204020203" pitchFamily="34" charset="0"/>
+                <a:cs typeface="Segoe UI" panose="020B0502040204020203" pitchFamily="34" charset="0"/>
+              </a:rPr>
+              <a:t>(b)</a:t>
+            </a:r>
+          </a:p>
+        </p:txBody>
+      </p:sp>
+      <p:sp>
+        <p:nvSpPr>
+          <p:cNvPr id="9" name="TextBox 8">
+            <a:extLst>
+              <a:ext uri="{FF2B5EF4-FFF2-40B4-BE49-F238E27FC236}">
+                <a16:creationId xmlns:a16="http://schemas.microsoft.com/office/drawing/2014/main" id="{DA34F291-357B-AF6E-E9AD-0412D4EF1ABF}"/>
+              </a:ext>
+            </a:extLst>
+          </p:cNvPr>
+          <p:cNvSpPr txBox="1"/>
+          <p:nvPr/>
+        </p:nvSpPr>
+        <p:spPr>
+          <a:xfrm>
+            <a:off x="6456693" y="18794"/>
+            <a:ext cx="554477" cy="369332"/>
+          </a:xfrm>
+          <a:prstGeom prst="rect">
+            <a:avLst/>
+          </a:prstGeom>
+          <a:noFill/>
+        </p:spPr>
+        <p:txBody>
+          <a:bodyPr wrap="square" rtlCol="0">
+            <a:spAutoFit/>
+          </a:bodyPr>
+          <a:lstStyle/>
+          <a:p>
+            <a:r>
+              <a:rPr lang="en-GB" dirty="0">
+                <a:solidFill>
+                  <a:srgbClr val="0070C0"/>
+                </a:solidFill>
+                <a:latin typeface="Segoe UI" panose="020B0502040204020203" pitchFamily="34" charset="0"/>
+                <a:cs typeface="Segoe UI" panose="020B0502040204020203" pitchFamily="34" charset="0"/>
+              </a:rPr>
+              <a:t>(a)</a:t>
+            </a:r>
+          </a:p>
+        </p:txBody>
+      </p:sp>
+      <p:pic>
+        <p:nvPicPr>
+          <p:cNvPr id="3" name="Picture 2">
+            <a:extLst>
+              <a:ext uri="{FF2B5EF4-FFF2-40B4-BE49-F238E27FC236}">
+                <a16:creationId xmlns:a16="http://schemas.microsoft.com/office/drawing/2014/main" id="{E513F8B8-A1B1-5247-8EEC-EF6AFBC5CDCF}"/>
+              </a:ext>
+            </a:extLst>
+          </p:cNvPr>
+          <p:cNvPicPr>
+            <a:picLocks noChangeAspect="1"/>
+          </p:cNvPicPr>
+          <p:nvPr/>
+        </p:nvPicPr>
+        <p:blipFill>
+          <a:blip r:embed="rId3">
+            <a:extLst>
+              <a:ext uri="{28A0092B-C50C-407E-A947-70E740481C1C}">
+                <a14:useLocalDpi xmlns:a14="http://schemas.microsoft.com/office/drawing/2010/main" val="0"/>
+              </a:ext>
+            </a:extLst>
+          </a:blip>
+          <a:stretch>
+            <a:fillRect/>
+          </a:stretch>
+        </p:blipFill>
+        <p:spPr>
+          <a:xfrm>
+            <a:off x="1649067" y="3031705"/>
+            <a:ext cx="9590770" cy="3826295"/>
+          </a:xfrm>
+          <a:prstGeom prst="rect">
+            <a:avLst/>
+          </a:prstGeom>
+        </p:spPr>
+      </p:pic>
+    </p:spTree>
+    <p:extLst>
+      <p:ext uri="{BB962C8B-B14F-4D97-AF65-F5344CB8AC3E}">
+        <p14:creationId xmlns:p14="http://schemas.microsoft.com/office/powerpoint/2010/main" val="3404149044"/>
+      </p:ext>
+    </p:extLst>
+  </p:cSld>
+  <p:clrMapOvr>
+    <a:masterClrMapping/>
+  </p:clrMapOvr>
+</p:sld>
+</file>
+
 <file path=ppt/theme/theme1.xml><?xml version="1.0" encoding="utf-8"?>
 <a:theme xmlns:a="http://schemas.openxmlformats.org/drawingml/2006/main" name="Office Theme">
   <a:themeElements>
